--- a/decks/englit-gothic/englit-gothic_ch1_what-is-gothic.pptx
+++ b/decks/englit-gothic/englit-gothic_ch1_what-is-gothic.pptx
@@ -124,36 +124,36 @@
   <p:extLst>
     <p:ext uri="{521415D9-36F7-43E2-AB2F-B90AF26B5E84}">
       <p14:sectionLst xmlns:p14="http://schemas.microsoft.com/office/powerpoint/2010/main">
-        <p14:section name="Opening" id="{309c2d3a-b1ae-da13-a89f-1fc7785f74b2}">
+        <p14:section name="Opening" id="{d643af3e-e3ac-192e-8ca8-e217280b372b}">
           <p14:sldIdLst>
             <p14:sldId id="256"/>
           </p14:sldIdLst>
         </p14:section>
-        <p14:section name="Gate" id="{06845a6d-62b5-fd8a-96bf-23288ebf2d01}">
+        <p14:section name="Gate" id="{cdd6f82f-90f8-9643-304f-0df531d75ca5}">
           <p14:sldIdLst>
             <p14:sldId id="257"/>
             <p14:sldId id="258"/>
           </p14:sldIdLst>
         </p14:section>
-        <p14:section name="Pre-teach" id="{585f3818-4c81-9791-7aa4-8191ac53e7c3}">
+        <p14:section name="Pre-teach" id="{53bdd37a-86cd-bf39-bbf1-f8ca031a58fb}">
           <p14:sldIdLst>
             <p14:sldId id="259"/>
           </p14:sldIdLst>
         </p14:section>
-        <p14:section name="Read-along" id="{70fbdba3-6dfd-e2b8-bccd-f5e28a69d0ad}">
+        <p14:section name="Read-along" id="{5dbcdddb-5407-3da4-9b70-4a0ef8287a46}">
           <p14:sldIdLst>
             <p14:sldId id="260"/>
             <p14:sldId id="261"/>
           </p14:sldIdLst>
         </p14:section>
-        <p14:section name="Teach" id="{cb1fcc55-b530-4b68-72ea-e7560ec48453}">
+        <p14:section name="Teach" id="{4f365c24-84f7-3156-4978-6ed703e5c401}">
           <p14:sldIdLst>
             <p14:sldId id="262"/>
             <p14:sldId id="263"/>
             <p14:sldId id="264"/>
           </p14:sldIdLst>
         </p14:section>
-        <p14:section name="Routes" id="{495423ed-fe64-8075-21c8-2b33c1027867}">
+        <p14:section name="Routes" id="{315fa4cc-d6d9-5fa5-baf3-01ad69b3b600}">
           <p14:sldIdLst>
             <p14:sldId id="265"/>
             <p14:sldId id="266"/>
@@ -162,12 +162,12 @@
             <p14:sldId id="269"/>
           </p14:sldIdLst>
         </p14:section>
-        <p14:section name="Close" id="{6c576083-f4f7-3223-ae3b-d51691a8ff69}">
+        <p14:section name="Close" id="{a5a4d19d-06d0-78b1-1d1b-5cd17c28b2dc}">
           <p14:sldIdLst>
             <p14:sldId id="270"/>
           </p14:sldIdLst>
         </p14:section>
-        <p14:section name="Answers" id="{f6f57c2f-867d-1b8e-aceb-048575d6f550}">
+        <p14:section name="Answers" id="{0ffc1071-7e34-3103-1c45-1b3abb193d0e}">
           <p14:sldIdLst>
             <p14:sldId id="271"/>
             <p14:sldId id="272"/>
@@ -1141,7 +1141,7 @@
               <a:rPr lang="en-US" dirty="0"/>
               <a:t>Exit ticket — individual, silent, on a slip or mini-whiteboard. Recall before help: no notes, no lanes, no hints. Collect before pupils leave.
 Question: Read this sentence: ‘Alone on the moor, I heard the chapel bell toll once, though nobody had rung it in a hundred years.’ Which Gothic convention is NOT used here?
-Answer: C   Blood and body parts. The sentence has isolation (alone on the moor), the supernatural (a bell that rings itself) and religious symbolism (the chapel), but no blood or body parts.
+Answer: B   Blood and body parts. The sentence has isolation (alone on the moor), the supernatural (a bell that rings itself) and religious symbolism (the chapel), but no blood or body parts.
 Source of this question: module 3 task ("Spot the conventions") from the manifest.
 Sort the slips: correct → ready to move on; incorrect → start next lesson in the pre-teach group, with the read-along and the Support lane. Same destination next time.</a:t>
             </a:r>
@@ -1414,7 +1414,7 @@
             <a:r>
               <a:rPr lang="en-US" dirty="0"/>
               <a:t>Answers — exit ticket: Exit ticket. Reveal the answer; pupils mark their own work in a different colour, then read the "why" together. Same destination for every lane, so one answer serves the whole class.
-Answer: C   Blood and body parts
+Answer: B   Blood and body parts
 Why: The sentence has isolation (alone on the moor), the supernatural (a bell that rings itself) and religious symbolism (the chapel), but no blood or body parts.
 Ask a Support pupil to explain one step, and a Stretch pupil to share their extension.</a:t>
             </a:r>
@@ -1505,9 +1505,9 @@
             <a:r>
               <a:rPr lang="en-US" dirty="0"/>
               <a:t>Do now — retrieval. Silent, no notes, no help: recall comes before any support. Give about four minutes.
-1. Which novel is usually called the first Gothic novel?  →  B   The Castle of Otranto (1764)
+1. Which novel is usually called the first Gothic novel?  →  D   The Castle of Otranto (1764)
 2. A ___ is something a type of story usually includes, such as a ruined castle or a ghost.  →  convention
-3. Which of these is a language feature rather than a Gothic convention?  →  B   Pathetic fallacy
+3. Which of these is a language feature rather than a Gothic convention?  →  A   Pathetic fallacy
 Circulate: who gets 3/3 (Stretch route), 2/3 (Core), 0–1 (Support)? Use this to route pupils later in the lesson.</a:t>
             </a:r>
             <a:endParaRPr lang="en-US" dirty="0"/>
@@ -1597,9 +1597,9 @@
             <a:r>
               <a:rPr lang="en-US" dirty="0"/>
               <a:t>Answers — pupils mark their own in a different colour, then hands up for 3/3, 2/3, 1/3.
-1. B   The Castle of Otranto (1764). Horace Walpole's The Castle of Otranto was published in 1764, and its second edition was subtitled A Gothic Story. The others came 54 to 219 years later.
+1. D   The Castle of Otranto (1764). Horace Walpole's The Castle of Otranto was published in 1764, and its second edition was subtitled A Gothic Story. The others came 54 to 219 years later.
 2. convention. Conventions are the expected ingredients of a genre. Gothic conventions include isolated settings, the supernatural and constant tension.
-3. B   Pathetic fallacy. Pathetic fallacy is a choice about how the writer uses words: the weather describes a mood. The other three are things the story contains.
+3. A   Pathetic fallacy. Pathetic fallacy is a choice about how the writer uses words: the weather describes a mood. The other three are things the story contains.
 Say the route each score points to: 3/3 Stretch, 2/3 Core, 0–1 Support. Pupils may choose to move up.</a:t>
             </a:r>
             <a:endParaRPr lang="en-US" dirty="0"/>
@@ -8540,7 +8540,7 @@
                 <a:ea typeface="Calibri" pitchFamily="34" charset="-122"/>
                 <a:cs typeface="Calibri" pitchFamily="34" charset="-120"/>
               </a:rPr>
-              <a:t>An isolated setting</a:t>
+              <a:t>The supernatural</a:t>
             </a:r>
             <a:endParaRPr lang="en-US" sz="2200" dirty="0"/>
           </a:p>
@@ -8577,7 +8577,7 @@
                 <a:ea typeface="Calibri" pitchFamily="34" charset="-122"/>
                 <a:cs typeface="Calibri" pitchFamily="34" charset="-120"/>
               </a:rPr>
-              <a:t>The supernatural</a:t>
+              <a:t>Blood and body parts</a:t>
             </a:r>
             <a:endParaRPr lang="en-US" sz="2200" dirty="0"/>
           </a:p>
@@ -8614,7 +8614,7 @@
                 <a:ea typeface="Calibri" pitchFamily="34" charset="-122"/>
                 <a:cs typeface="Calibri" pitchFamily="34" charset="-120"/>
               </a:rPr>
-              <a:t>Blood and body parts</a:t>
+              <a:t>An isolated setting</a:t>
             </a:r>
             <a:endParaRPr lang="en-US" sz="2200" dirty="0"/>
           </a:p>
@@ -10270,7 +10270,7 @@
                 <a:ea typeface="Cambria" pitchFamily="34" charset="-122"/>
                 <a:cs typeface="Cambria" pitchFamily="34" charset="-120"/>
               </a:rPr>
-              <a:t>C   Blood and body parts</a:t>
+              <a:t>B   Blood and body parts</a:t>
             </a:r>
             <a:endParaRPr lang="en-US" sz="1800" dirty="0"/>
           </a:p>
@@ -10804,7 +10804,7 @@
                 <a:ea typeface="Calibri" pitchFamily="34" charset="-122"/>
                 <a:cs typeface="Calibri" pitchFamily="34" charset="-120"/>
               </a:rPr>
-              <a:t>Frankenstein (1818)</a:t>
+              <a:t>Dracula (1897)</a:t>
             </a:r>
             <a:endParaRPr lang="en-US" sz="2200" dirty="0"/>
           </a:p>
@@ -10841,7 +10841,7 @@
                 <a:ea typeface="Calibri" pitchFamily="34" charset="-122"/>
                 <a:cs typeface="Calibri" pitchFamily="34" charset="-120"/>
               </a:rPr>
-              <a:t>The Castle of Otranto (1764)</a:t>
+              <a:t>The Woman in Black (1983)</a:t>
             </a:r>
             <a:endParaRPr lang="en-US" sz="2200" dirty="0"/>
           </a:p>
@@ -10878,7 +10878,7 @@
                 <a:ea typeface="Calibri" pitchFamily="34" charset="-122"/>
                 <a:cs typeface="Calibri" pitchFamily="34" charset="-120"/>
               </a:rPr>
-              <a:t>Dracula (1897)</a:t>
+              <a:t>Frankenstein (1818)</a:t>
             </a:r>
             <a:endParaRPr lang="en-US" sz="2200" dirty="0"/>
           </a:p>
@@ -10915,7 +10915,7 @@
                 <a:ea typeface="Calibri" pitchFamily="34" charset="-122"/>
                 <a:cs typeface="Calibri" pitchFamily="34" charset="-120"/>
               </a:rPr>
-              <a:t>The Woman in Black (1983)</a:t>
+              <a:t>The Castle of Otranto (1764)</a:t>
             </a:r>
             <a:endParaRPr lang="en-US" sz="2200" dirty="0"/>
           </a:p>
@@ -11317,7 +11317,7 @@
                 <a:ea typeface="Calibri" pitchFamily="34" charset="-122"/>
                 <a:cs typeface="Calibri" pitchFamily="34" charset="-120"/>
               </a:rPr>
-              <a:t>A remote, isolated setting</a:t>
+              <a:t>Pathetic fallacy</a:t>
             </a:r>
             <a:endParaRPr lang="en-US" sz="2000" dirty="0"/>
           </a:p>
@@ -11354,7 +11354,7 @@
                 <a:ea typeface="Calibri" pitchFamily="34" charset="-122"/>
                 <a:cs typeface="Calibri" pitchFamily="34" charset="-120"/>
               </a:rPr>
-              <a:t>Pathetic fallacy</a:t>
+              <a:t>Ghosts and the supernatural</a:t>
             </a:r>
             <a:endParaRPr lang="en-US" sz="2000" dirty="0"/>
           </a:p>
@@ -11391,7 +11391,7 @@
                 <a:ea typeface="Calibri" pitchFamily="34" charset="-122"/>
                 <a:cs typeface="Calibri" pitchFamily="34" charset="-120"/>
               </a:rPr>
-              <a:t>Ghosts and the supernatural</a:t>
+              <a:t>A remote, isolated setting</a:t>
             </a:r>
             <a:endParaRPr lang="en-US" sz="2000" dirty="0"/>
           </a:p>
@@ -11829,7 +11829,7 @@
                 <a:ea typeface="Calibri" pitchFamily="34" charset="-122"/>
                 <a:cs typeface="Calibri" pitchFamily="34" charset="-120"/>
               </a:rPr>
-              <a:t>B   The Castle of Otranto (1764)</a:t>
+              <a:t>D   The Castle of Otranto (1764)</a:t>
             </a:r>
             <a:endParaRPr lang="en-US" sz="2200" dirty="0"/>
           </a:p>
@@ -12329,7 +12329,7 @@
                 <a:ea typeface="Calibri" pitchFamily="34" charset="-122"/>
                 <a:cs typeface="Calibri" pitchFamily="34" charset="-120"/>
               </a:rPr>
-              <a:t>B   Pathetic fallacy</a:t>
+              <a:t>A   Pathetic fallacy</a:t>
             </a:r>
             <a:endParaRPr lang="en-US" sz="2200" dirty="0"/>
           </a:p>

--- a/decks/englit-gothic/englit-gothic_ch1_what-is-gothic.pptx
+++ b/decks/englit-gothic/englit-gothic_ch1_what-is-gothic.pptx
@@ -124,36 +124,36 @@
   <p:extLst>
     <p:ext uri="{521415D9-36F7-43E2-AB2F-B90AF26B5E84}">
       <p14:sectionLst xmlns:p14="http://schemas.microsoft.com/office/powerpoint/2010/main">
-        <p14:section name="Opening" id="{d643af3e-e3ac-192e-8ca8-e217280b372b}">
+        <p14:section name="Opening" id="{bb70c773-2290-b3a2-05fd-66860ddfb44c}">
           <p14:sldIdLst>
             <p14:sldId id="256"/>
           </p14:sldIdLst>
         </p14:section>
-        <p14:section name="Gate" id="{cdd6f82f-90f8-9643-304f-0df531d75ca5}">
+        <p14:section name="Gate" id="{6b57f006-1fe6-5766-f2a4-d3960296b517}">
           <p14:sldIdLst>
             <p14:sldId id="257"/>
             <p14:sldId id="258"/>
           </p14:sldIdLst>
         </p14:section>
-        <p14:section name="Pre-teach" id="{53bdd37a-86cd-bf39-bbf1-f8ca031a58fb}">
+        <p14:section name="Pre-teach" id="{1932df52-31b3-ffee-150d-86ddf3e63bdf}">
           <p14:sldIdLst>
             <p14:sldId id="259"/>
           </p14:sldIdLst>
         </p14:section>
-        <p14:section name="Read-along" id="{5dbcdddb-5407-3da4-9b70-4a0ef8287a46}">
+        <p14:section name="Read-along" id="{88e12ea5-4155-c7af-41d7-e91914bd6f00}">
           <p14:sldIdLst>
             <p14:sldId id="260"/>
             <p14:sldId id="261"/>
           </p14:sldIdLst>
         </p14:section>
-        <p14:section name="Teach" id="{4f365c24-84f7-3156-4978-6ed703e5c401}">
+        <p14:section name="Teach" id="{a81e76f7-46a5-5509-17e6-608afb99538a}">
           <p14:sldIdLst>
             <p14:sldId id="262"/>
             <p14:sldId id="263"/>
             <p14:sldId id="264"/>
           </p14:sldIdLst>
         </p14:section>
-        <p14:section name="Routes" id="{315fa4cc-d6d9-5fa5-baf3-01ad69b3b600}">
+        <p14:section name="Routes" id="{e6ac97e4-b0e0-1bf0-7650-1a734159f981}">
           <p14:sldIdLst>
             <p14:sldId id="265"/>
             <p14:sldId id="266"/>
@@ -162,12 +162,12 @@
             <p14:sldId id="269"/>
           </p14:sldIdLst>
         </p14:section>
-        <p14:section name="Close" id="{a5a4d19d-06d0-78b1-1d1b-5cd17c28b2dc}">
+        <p14:section name="Close" id="{65bdce9e-331b-7a24-805b-717969bf2533}">
           <p14:sldIdLst>
             <p14:sldId id="270"/>
           </p14:sldIdLst>
         </p14:section>
-        <p14:section name="Answers" id="{0ffc1071-7e34-3103-1c45-1b3abb193d0e}">
+        <p14:section name="Answers" id="{e5c93a0c-43ec-5e5e-30cc-478e8674a60c}">
           <p14:sldIdLst>
             <p14:sldId id="271"/>
             <p14:sldId id="272"/>
